--- a/deliverables/Presentation.pptx
+++ b/deliverables/Presentation.pptx
@@ -10,8 +10,7 @@
     <p:sldId id="258" r:id="rId4"/>
     <p:sldId id="261" r:id="rId5"/>
     <p:sldId id="263" r:id="rId6"/>
-    <p:sldId id="262" r:id="rId7"/>
-    <p:sldId id="260" r:id="rId8"/>
+    <p:sldId id="260" r:id="rId7"/>
   </p:sldIdLst>
   <p:sldSz cx="12192000" cy="6858000"/>
   <p:notesSz cx="6858000" cy="9144000"/>
@@ -282,7 +281,7 @@
           <a:p>
             <a:fld id="{6444479B-705B-4489-957E-7E8A228BDFA0}" type="datetime1">
               <a:rPr lang="en-US" smtClean="0"/>
-              <a:t>6/24/2025</a:t>
+              <a:t>6/28/2025</a:t>
             </a:fld>
             <a:endParaRPr lang="en-US"/>
           </a:p>
@@ -482,7 +481,7 @@
           <a:p>
             <a:fld id="{C07B66AD-7C08-490A-ADA4-B47E10FB2407}" type="datetime1">
               <a:rPr lang="en-US" smtClean="0"/>
-              <a:t>6/24/2025</a:t>
+              <a:t>6/28/2025</a:t>
             </a:fld>
             <a:endParaRPr lang="en-US"/>
           </a:p>
@@ -741,7 +740,7 @@
           <a:p>
             <a:fld id="{05B95027-4255-49E7-9841-CD21BCC99996}" type="datetime1">
               <a:rPr lang="en-US" smtClean="0"/>
-              <a:t>6/24/2025</a:t>
+              <a:t>6/28/2025</a:t>
             </a:fld>
             <a:endParaRPr lang="en-US"/>
           </a:p>
@@ -982,7 +981,7 @@
           <a:p>
             <a:fld id="{9F89F774-3FA6-43B8-9241-99959C8FD463}" type="datetime1">
               <a:rPr lang="en-US" smtClean="0"/>
-              <a:t>6/24/2025</a:t>
+              <a:t>6/28/2025</a:t>
             </a:fld>
             <a:endParaRPr lang="en-US"/>
           </a:p>
@@ -1309,7 +1308,7 @@
           <a:p>
             <a:fld id="{F9504452-5DCC-4FE2-A5C9-8A5EF6714D65}" type="datetime1">
               <a:rPr lang="en-US" smtClean="0"/>
-              <a:t>6/24/2025</a:t>
+              <a:t>6/28/2025</a:t>
             </a:fld>
             <a:endParaRPr lang="en-US"/>
           </a:p>
@@ -1619,7 +1618,7 @@
           <a:p>
             <a:fld id="{E579ABC2-0180-4F3A-A895-A85BC724D472}" type="datetime1">
               <a:rPr lang="en-US" smtClean="0"/>
-              <a:t>6/24/2025</a:t>
+              <a:t>6/28/2025</a:t>
             </a:fld>
             <a:endParaRPr lang="en-US"/>
           </a:p>
@@ -2037,7 +2036,7 @@
           <a:p>
             <a:fld id="{6AEEA9BA-4E8F-439E-BEA4-91FBA01E3F5F}" type="datetime1">
               <a:rPr lang="en-US" smtClean="0"/>
-              <a:t>6/24/2025</a:t>
+              <a:t>6/28/2025</a:t>
             </a:fld>
             <a:endParaRPr lang="en-US"/>
           </a:p>
@@ -2179,7 +2178,7 @@
           <a:p>
             <a:fld id="{BE15BF18-0007-481C-AA29-413124BC3EE7}" type="datetime1">
               <a:rPr lang="en-US" smtClean="0"/>
-              <a:t>6/24/2025</a:t>
+              <a:t>6/28/2025</a:t>
             </a:fld>
             <a:endParaRPr lang="en-US"/>
           </a:p>
@@ -2341,7 +2340,7 @@
           <a:p>
             <a:fld id="{09BE9870-3748-43AD-B547-02A075CB4A1D}" type="datetime1">
               <a:rPr lang="en-US" smtClean="0"/>
-              <a:t>6/24/2025</a:t>
+              <a:t>6/28/2025</a:t>
             </a:fld>
             <a:endParaRPr lang="en-US"/>
           </a:p>
@@ -2658,7 +2657,7 @@
           <a:p>
             <a:fld id="{558E7897-33C5-4F1A-9307-D068E37F3DC7}" type="datetime1">
               <a:rPr lang="en-US" smtClean="0"/>
-              <a:t>6/24/2025</a:t>
+              <a:t>6/28/2025</a:t>
             </a:fld>
             <a:endParaRPr lang="en-US"/>
           </a:p>
@@ -2953,7 +2952,7 @@
           <a:p>
             <a:fld id="{82E171BA-CC09-47C8-A6DF-F5C5CB59CEEC}" type="datetime1">
               <a:rPr lang="en-US" smtClean="0"/>
-              <a:t>6/24/2025</a:t>
+              <a:t>6/28/2025</a:t>
             </a:fld>
             <a:endParaRPr lang="en-US"/>
           </a:p>
@@ -3194,7 +3193,7 @@
           <a:p>
             <a:fld id="{7DA38F49-B3E2-4BF0-BEC7-C30D34ABBB8D}" type="datetime1">
               <a:rPr lang="en-US" smtClean="0"/>
-              <a:t>6/24/2025</a:t>
+              <a:t>6/28/2025</a:t>
             </a:fld>
             <a:endParaRPr lang="en-US"/>
           </a:p>
@@ -5634,111 +5633,6 @@
 <file path=ppt/slides/slide6.xml><?xml version="1.0" encoding="utf-8"?>
 <p:sld xmlns:a="http://schemas.openxmlformats.org/drawingml/2006/main" xmlns:r="http://schemas.openxmlformats.org/officeDocument/2006/relationships" xmlns:p="http://schemas.openxmlformats.org/presentationml/2006/main">
   <p:cSld>
-    <p:spTree>
-      <p:nvGrpSpPr>
-        <p:cNvPr id="1" name=""/>
-        <p:cNvGrpSpPr/>
-        <p:nvPr/>
-      </p:nvGrpSpPr>
-      <p:grpSpPr>
-        <a:xfrm>
-          <a:off x="0" y="0"/>
-          <a:ext cx="0" cy="0"/>
-          <a:chOff x="0" y="0"/>
-          <a:chExt cx="0" cy="0"/>
-        </a:xfrm>
-      </p:grpSpPr>
-      <p:sp>
-        <p:nvSpPr>
-          <p:cNvPr id="2" name="Titolo 1">
-            <a:extLst>
-              <a:ext uri="{FF2B5EF4-FFF2-40B4-BE49-F238E27FC236}">
-                <a16:creationId xmlns:a16="http://schemas.microsoft.com/office/drawing/2014/main" id="{645DA771-7B1F-3F5A-1DDA-C2A7D004E49E}"/>
-              </a:ext>
-            </a:extLst>
-          </p:cNvPr>
-          <p:cNvSpPr>
-            <a:spLocks noGrp="1"/>
-          </p:cNvSpPr>
-          <p:nvPr>
-            <p:ph type="title"/>
-          </p:nvPr>
-        </p:nvSpPr>
-        <p:spPr/>
-        <p:txBody>
-          <a:bodyPr/>
-          <a:lstStyle/>
-          <a:p>
-            <a:endParaRPr lang="it-IT"/>
-          </a:p>
-        </p:txBody>
-      </p:sp>
-      <p:sp>
-        <p:nvSpPr>
-          <p:cNvPr id="3" name="Segnaposto contenuto 2">
-            <a:extLst>
-              <a:ext uri="{FF2B5EF4-FFF2-40B4-BE49-F238E27FC236}">
-                <a16:creationId xmlns:a16="http://schemas.microsoft.com/office/drawing/2014/main" id="{6AEF2C87-F011-F4CD-CA6D-6B5B96F3BD1A}"/>
-              </a:ext>
-            </a:extLst>
-          </p:cNvPr>
-          <p:cNvSpPr>
-            <a:spLocks noGrp="1"/>
-          </p:cNvSpPr>
-          <p:nvPr>
-            <p:ph sz="half" idx="1"/>
-          </p:nvPr>
-        </p:nvSpPr>
-        <p:spPr/>
-        <p:txBody>
-          <a:bodyPr/>
-          <a:lstStyle/>
-          <a:p>
-            <a:endParaRPr lang="it-IT"/>
-          </a:p>
-        </p:txBody>
-      </p:sp>
-      <p:sp>
-        <p:nvSpPr>
-          <p:cNvPr id="4" name="Segnaposto contenuto 3">
-            <a:extLst>
-              <a:ext uri="{FF2B5EF4-FFF2-40B4-BE49-F238E27FC236}">
-                <a16:creationId xmlns:a16="http://schemas.microsoft.com/office/drawing/2014/main" id="{68D51624-89FF-0FD7-1E03-839939C14E01}"/>
-              </a:ext>
-            </a:extLst>
-          </p:cNvPr>
-          <p:cNvSpPr>
-            <a:spLocks noGrp="1"/>
-          </p:cNvSpPr>
-          <p:nvPr>
-            <p:ph sz="half" idx="2"/>
-          </p:nvPr>
-        </p:nvSpPr>
-        <p:spPr/>
-        <p:txBody>
-          <a:bodyPr/>
-          <a:lstStyle/>
-          <a:p>
-            <a:endParaRPr lang="it-IT"/>
-          </a:p>
-        </p:txBody>
-      </p:sp>
-    </p:spTree>
-    <p:extLst>
-      <p:ext uri="{BB962C8B-B14F-4D97-AF65-F5344CB8AC3E}">
-        <p14:creationId xmlns:p14="http://schemas.microsoft.com/office/powerpoint/2010/main" val="868218718"/>
-      </p:ext>
-    </p:extLst>
-  </p:cSld>
-  <p:clrMapOvr>
-    <a:masterClrMapping/>
-  </p:clrMapOvr>
-</p:sld>
-</file>
-
-<file path=ppt/slides/slide7.xml><?xml version="1.0" encoding="utf-8"?>
-<p:sld xmlns:a="http://schemas.openxmlformats.org/drawingml/2006/main" xmlns:r="http://schemas.openxmlformats.org/officeDocument/2006/relationships" xmlns:p="http://schemas.openxmlformats.org/presentationml/2006/main">
-  <p:cSld>
     <p:bg>
       <p:bgPr>
         <a:solidFill>
